--- a/ppt/Building_Detection_YOLOv8_PPT.pptx
+++ b/ppt/Building_Detection_YOLOv8_PPT.pptx
@@ -27794,7 +27794,139 @@
                 <a:ea typeface="Calibri" pitchFamily="34" charset="-122"/>
                 <a:cs typeface="Calibri" pitchFamily="34" charset="-120"/>
               </a:rPr>
-              <a:t>Kelas Home dan Mosque memiliki variasi bentuk tinggi sehingga recall lebih rendah.</a:t>
+              <a:t>Hasil </a:t>
+            </a:r>
+            <a:r>
+              <a:rPr lang="en-US" sz="1100" dirty="0" err="1">
+                <a:solidFill>
+                  <a:srgbClr val="A5B4FC"/>
+                </a:solidFill>
+                <a:latin typeface="Calibri" pitchFamily="34" charset="0"/>
+                <a:ea typeface="Calibri" pitchFamily="34" charset="-122"/>
+                <a:cs typeface="Calibri" pitchFamily="34" charset="-120"/>
+              </a:rPr>
+              <a:t>deteksi</a:t>
+            </a:r>
+            <a:r>
+              <a:rPr lang="en-US" sz="1100" dirty="0">
+                <a:solidFill>
+                  <a:srgbClr val="A5B4FC"/>
+                </a:solidFill>
+                <a:latin typeface="Calibri" pitchFamily="34" charset="0"/>
+                <a:ea typeface="Calibri" pitchFamily="34" charset="-122"/>
+                <a:cs typeface="Calibri" pitchFamily="34" charset="-120"/>
+              </a:rPr>
+              <a:t> sangat </a:t>
+            </a:r>
+            <a:r>
+              <a:rPr lang="en-US" sz="1100" dirty="0" err="1">
+                <a:solidFill>
+                  <a:srgbClr val="A5B4FC"/>
+                </a:solidFill>
+                <a:latin typeface="Calibri" pitchFamily="34" charset="0"/>
+                <a:ea typeface="Calibri" pitchFamily="34" charset="-122"/>
+                <a:cs typeface="Calibri" pitchFamily="34" charset="-120"/>
+              </a:rPr>
+              <a:t>bergantung</a:t>
+            </a:r>
+            <a:r>
+              <a:rPr lang="en-US" sz="1100" dirty="0">
+                <a:solidFill>
+                  <a:srgbClr val="A5B4FC"/>
+                </a:solidFill>
+                <a:latin typeface="Calibri" pitchFamily="34" charset="0"/>
+                <a:ea typeface="Calibri" pitchFamily="34" charset="-122"/>
+                <a:cs typeface="Calibri" pitchFamily="34" charset="-120"/>
+              </a:rPr>
+              <a:t> pada </a:t>
+            </a:r>
+            <a:r>
+              <a:rPr lang="en-US" sz="1100" dirty="0" err="1">
+                <a:solidFill>
+                  <a:srgbClr val="A5B4FC"/>
+                </a:solidFill>
+                <a:latin typeface="Calibri" pitchFamily="34" charset="0"/>
+                <a:ea typeface="Calibri" pitchFamily="34" charset="-122"/>
+                <a:cs typeface="Calibri" pitchFamily="34" charset="-120"/>
+              </a:rPr>
+              <a:t>kualitas</a:t>
+            </a:r>
+            <a:r>
+              <a:rPr lang="en-US" sz="1100" dirty="0">
+                <a:solidFill>
+                  <a:srgbClr val="A5B4FC"/>
+                </a:solidFill>
+                <a:latin typeface="Calibri" pitchFamily="34" charset="0"/>
+                <a:ea typeface="Calibri" pitchFamily="34" charset="-122"/>
+                <a:cs typeface="Calibri" pitchFamily="34" charset="-120"/>
+              </a:rPr>
+              <a:t> dan </a:t>
+            </a:r>
+            <a:r>
+              <a:rPr lang="en-US" sz="1100" dirty="0" err="1">
+                <a:solidFill>
+                  <a:srgbClr val="A5B4FC"/>
+                </a:solidFill>
+                <a:latin typeface="Calibri" pitchFamily="34" charset="0"/>
+                <a:ea typeface="Calibri" pitchFamily="34" charset="-122"/>
+                <a:cs typeface="Calibri" pitchFamily="34" charset="-120"/>
+              </a:rPr>
+              <a:t>resolusi</a:t>
+            </a:r>
+            <a:r>
+              <a:rPr lang="en-US" sz="1100" dirty="0">
+                <a:solidFill>
+                  <a:srgbClr val="A5B4FC"/>
+                </a:solidFill>
+                <a:latin typeface="Calibri" pitchFamily="34" charset="0"/>
+                <a:ea typeface="Calibri" pitchFamily="34" charset="-122"/>
+                <a:cs typeface="Calibri" pitchFamily="34" charset="-120"/>
+              </a:rPr>
+              <a:t> </a:t>
+            </a:r>
+            <a:r>
+              <a:rPr lang="en-US" sz="1100" dirty="0" err="1">
+                <a:solidFill>
+                  <a:srgbClr val="A5B4FC"/>
+                </a:solidFill>
+                <a:latin typeface="Calibri" pitchFamily="34" charset="0"/>
+                <a:ea typeface="Calibri" pitchFamily="34" charset="-122"/>
+                <a:cs typeface="Calibri" pitchFamily="34" charset="-120"/>
+              </a:rPr>
+              <a:t>citra</a:t>
+            </a:r>
+            <a:r>
+              <a:rPr lang="en-US" sz="1100" dirty="0">
+                <a:solidFill>
+                  <a:srgbClr val="A5B4FC"/>
+                </a:solidFill>
+                <a:latin typeface="Calibri" pitchFamily="34" charset="0"/>
+                <a:ea typeface="Calibri" pitchFamily="34" charset="-122"/>
+                <a:cs typeface="Calibri" pitchFamily="34" charset="-120"/>
+              </a:rPr>
+              <a:t> </a:t>
+            </a:r>
+            <a:r>
+              <a:rPr lang="en-US" sz="1100" dirty="0" err="1">
+                <a:solidFill>
+                  <a:srgbClr val="A5B4FC"/>
+                </a:solidFill>
+                <a:latin typeface="Calibri" pitchFamily="34" charset="0"/>
+                <a:ea typeface="Calibri" pitchFamily="34" charset="-122"/>
+                <a:cs typeface="Calibri" pitchFamily="34" charset="-120"/>
+              </a:rPr>
+              <a:t>satelit</a:t>
+            </a:r>
+            <a:r>
+              <a:rPr lang="en-US" sz="1100" dirty="0">
+                <a:solidFill>
+                  <a:srgbClr val="A5B4FC"/>
+                </a:solidFill>
+                <a:latin typeface="Calibri" pitchFamily="34" charset="0"/>
+                <a:ea typeface="Calibri" pitchFamily="34" charset="-122"/>
+                <a:cs typeface="Calibri" pitchFamily="34" charset="-120"/>
+              </a:rPr>
+              <a:t> input.</a:t>
             </a:r>
             <a:endParaRPr lang="en-US" sz="1100" dirty="0"/>
           </a:p>
@@ -27928,6 +28060,17 @@
               <a:buNone/>
             </a:pPr>
             <a:r>
+              <a:rPr lang="en-US" sz="1100" dirty="0" err="1">
+                <a:solidFill>
+                  <a:srgbClr val="A5B4FC"/>
+                </a:solidFill>
+                <a:latin typeface="Calibri" pitchFamily="34" charset="0"/>
+                <a:ea typeface="Calibri" pitchFamily="34" charset="-122"/>
+                <a:cs typeface="Calibri" pitchFamily="34" charset="-120"/>
+              </a:rPr>
+              <a:t>Objek</a:t>
+            </a:r>
+            <a:r>
               <a:rPr lang="en-US" sz="1100" dirty="0">
                 <a:solidFill>
                   <a:srgbClr val="A5B4FC"/>
@@ -27936,7 +28079,183 @@
                 <a:ea typeface="Calibri" pitchFamily="34" charset="-122"/>
                 <a:cs typeface="Calibri" pitchFamily="34" charset="-120"/>
               </a:rPr>
-              <a:t>Hasil deteksi sangat bergantung pada kualitas dan resolusi citra satelit input.</a:t>
+              <a:t> </a:t>
+            </a:r>
+            <a:r>
+              <a:rPr lang="en-US" sz="1100" dirty="0" err="1">
+                <a:solidFill>
+                  <a:srgbClr val="A5B4FC"/>
+                </a:solidFill>
+                <a:latin typeface="Calibri" pitchFamily="34" charset="0"/>
+                <a:ea typeface="Calibri" pitchFamily="34" charset="-122"/>
+                <a:cs typeface="Calibri" pitchFamily="34" charset="-120"/>
+              </a:rPr>
+              <a:t>terlalu</a:t>
+            </a:r>
+            <a:r>
+              <a:rPr lang="en-US" sz="1100" dirty="0">
+                <a:solidFill>
+                  <a:srgbClr val="A5B4FC"/>
+                </a:solidFill>
+                <a:latin typeface="Calibri" pitchFamily="34" charset="0"/>
+                <a:ea typeface="Calibri" pitchFamily="34" charset="-122"/>
+                <a:cs typeface="Calibri" pitchFamily="34" charset="-120"/>
+              </a:rPr>
+              <a:t> </a:t>
+            </a:r>
+            <a:r>
+              <a:rPr lang="en-US" sz="1100" dirty="0" err="1">
+                <a:solidFill>
+                  <a:srgbClr val="A5B4FC"/>
+                </a:solidFill>
+                <a:latin typeface="Calibri" pitchFamily="34" charset="0"/>
+                <a:ea typeface="Calibri" pitchFamily="34" charset="-122"/>
+                <a:cs typeface="Calibri" pitchFamily="34" charset="-120"/>
+              </a:rPr>
+              <a:t>kecil</a:t>
+            </a:r>
+            <a:r>
+              <a:rPr lang="en-US" sz="1100" dirty="0">
+                <a:solidFill>
+                  <a:srgbClr val="A5B4FC"/>
+                </a:solidFill>
+                <a:latin typeface="Calibri" pitchFamily="34" charset="0"/>
+                <a:ea typeface="Calibri" pitchFamily="34" charset="-122"/>
+                <a:cs typeface="Calibri" pitchFamily="34" charset="-120"/>
+              </a:rPr>
+              <a:t>, blur, </a:t>
+            </a:r>
+            <a:r>
+              <a:rPr lang="en-US" sz="1100" dirty="0" err="1">
+                <a:solidFill>
+                  <a:srgbClr val="A5B4FC"/>
+                </a:solidFill>
+                <a:latin typeface="Calibri" pitchFamily="34" charset="0"/>
+                <a:ea typeface="Calibri" pitchFamily="34" charset="-122"/>
+                <a:cs typeface="Calibri" pitchFamily="34" charset="-120"/>
+              </a:rPr>
+              <a:t>atau</a:t>
+            </a:r>
+            <a:r>
+              <a:rPr lang="en-US" sz="1100" dirty="0">
+                <a:solidFill>
+                  <a:srgbClr val="A5B4FC"/>
+                </a:solidFill>
+                <a:latin typeface="Calibri" pitchFamily="34" charset="0"/>
+                <a:ea typeface="Calibri" pitchFamily="34" charset="-122"/>
+                <a:cs typeface="Calibri" pitchFamily="34" charset="-120"/>
+              </a:rPr>
+              <a:t> </a:t>
+            </a:r>
+            <a:r>
+              <a:rPr lang="en-US" sz="1100" dirty="0" err="1">
+                <a:solidFill>
+                  <a:srgbClr val="A5B4FC"/>
+                </a:solidFill>
+                <a:latin typeface="Calibri" pitchFamily="34" charset="0"/>
+                <a:ea typeface="Calibri" pitchFamily="34" charset="-122"/>
+                <a:cs typeface="Calibri" pitchFamily="34" charset="-120"/>
+              </a:rPr>
+              <a:t>tertutup</a:t>
+            </a:r>
+            <a:r>
+              <a:rPr lang="en-US" sz="1100" dirty="0">
+                <a:solidFill>
+                  <a:srgbClr val="A5B4FC"/>
+                </a:solidFill>
+                <a:latin typeface="Calibri" pitchFamily="34" charset="0"/>
+                <a:ea typeface="Calibri" pitchFamily="34" charset="-122"/>
+                <a:cs typeface="Calibri" pitchFamily="34" charset="-120"/>
+              </a:rPr>
+              <a:t> </a:t>
+            </a:r>
+            <a:r>
+              <a:rPr lang="en-US" sz="1100" dirty="0" err="1">
+                <a:solidFill>
+                  <a:srgbClr val="A5B4FC"/>
+                </a:solidFill>
+                <a:latin typeface="Calibri" pitchFamily="34" charset="0"/>
+                <a:ea typeface="Calibri" pitchFamily="34" charset="-122"/>
+                <a:cs typeface="Calibri" pitchFamily="34" charset="-120"/>
+              </a:rPr>
+              <a:t>pohon</a:t>
+            </a:r>
+            <a:r>
+              <a:rPr lang="en-US" sz="1100" dirty="0">
+                <a:solidFill>
+                  <a:srgbClr val="A5B4FC"/>
+                </a:solidFill>
+                <a:latin typeface="Calibri" pitchFamily="34" charset="0"/>
+                <a:ea typeface="Calibri" pitchFamily="34" charset="-122"/>
+                <a:cs typeface="Calibri" pitchFamily="34" charset="-120"/>
+              </a:rPr>
+              <a:t> </a:t>
+            </a:r>
+            <a:r>
+              <a:rPr lang="en-US" sz="1100" dirty="0" err="1">
+                <a:solidFill>
+                  <a:srgbClr val="A5B4FC"/>
+                </a:solidFill>
+                <a:latin typeface="Calibri" pitchFamily="34" charset="0"/>
+                <a:ea typeface="Calibri" pitchFamily="34" charset="-122"/>
+                <a:cs typeface="Calibri" pitchFamily="34" charset="-120"/>
+              </a:rPr>
+              <a:t>dapat</a:t>
+            </a:r>
+            <a:r>
+              <a:rPr lang="en-US" sz="1100" dirty="0">
+                <a:solidFill>
+                  <a:srgbClr val="A5B4FC"/>
+                </a:solidFill>
+                <a:latin typeface="Calibri" pitchFamily="34" charset="0"/>
+                <a:ea typeface="Calibri" pitchFamily="34" charset="-122"/>
+                <a:cs typeface="Calibri" pitchFamily="34" charset="-120"/>
+              </a:rPr>
+              <a:t> </a:t>
+            </a:r>
+            <a:r>
+              <a:rPr lang="en-US" sz="1100" dirty="0" err="1">
+                <a:solidFill>
+                  <a:srgbClr val="A5B4FC"/>
+                </a:solidFill>
+                <a:latin typeface="Calibri" pitchFamily="34" charset="0"/>
+                <a:ea typeface="Calibri" pitchFamily="34" charset="-122"/>
+                <a:cs typeface="Calibri" pitchFamily="34" charset="-120"/>
+              </a:rPr>
+              <a:t>tidak</a:t>
+            </a:r>
+            <a:r>
+              <a:rPr lang="en-US" sz="1100" dirty="0">
+                <a:solidFill>
+                  <a:srgbClr val="A5B4FC"/>
+                </a:solidFill>
+                <a:latin typeface="Calibri" pitchFamily="34" charset="0"/>
+                <a:ea typeface="Calibri" pitchFamily="34" charset="-122"/>
+                <a:cs typeface="Calibri" pitchFamily="34" charset="-120"/>
+              </a:rPr>
+              <a:t> </a:t>
+            </a:r>
+            <a:r>
+              <a:rPr lang="en-US" sz="1100" dirty="0" err="1">
+                <a:solidFill>
+                  <a:srgbClr val="A5B4FC"/>
+                </a:solidFill>
+                <a:latin typeface="Calibri" pitchFamily="34" charset="0"/>
+                <a:ea typeface="Calibri" pitchFamily="34" charset="-122"/>
+                <a:cs typeface="Calibri" pitchFamily="34" charset="-120"/>
+              </a:rPr>
+              <a:t>terdeteksi</a:t>
+            </a:r>
+            <a:r>
+              <a:rPr lang="en-US" sz="1100" dirty="0">
+                <a:solidFill>
+                  <a:srgbClr val="A5B4FC"/>
+                </a:solidFill>
+                <a:latin typeface="Calibri" pitchFamily="34" charset="0"/>
+                <a:ea typeface="Calibri" pitchFamily="34" charset="-122"/>
+                <a:cs typeface="Calibri" pitchFamily="34" charset="-120"/>
+              </a:rPr>
+              <a:t>.</a:t>
             </a:r>
             <a:endParaRPr lang="en-US" sz="1100" dirty="0"/>
           </a:p>
@@ -28078,7 +28397,139 @@
                 <a:ea typeface="Calibri" pitchFamily="34" charset="-122"/>
                 <a:cs typeface="Calibri" pitchFamily="34" charset="-120"/>
               </a:rPr>
-              <a:t>Objek terlalu kecil, blur, atau tertutup pohon dapat tidak terdeteksi.</a:t>
+              <a:t>Model </a:t>
+            </a:r>
+            <a:r>
+              <a:rPr lang="en-US" sz="1100" dirty="0" err="1">
+                <a:solidFill>
+                  <a:srgbClr val="A5B4FC"/>
+                </a:solidFill>
+                <a:latin typeface="Calibri" pitchFamily="34" charset="0"/>
+                <a:ea typeface="Calibri" pitchFamily="34" charset="-122"/>
+                <a:cs typeface="Calibri" pitchFamily="34" charset="-120"/>
+              </a:rPr>
+              <a:t>belum</a:t>
+            </a:r>
+            <a:r>
+              <a:rPr lang="en-US" sz="1100" dirty="0">
+                <a:solidFill>
+                  <a:srgbClr val="A5B4FC"/>
+                </a:solidFill>
+                <a:latin typeface="Calibri" pitchFamily="34" charset="0"/>
+                <a:ea typeface="Calibri" pitchFamily="34" charset="-122"/>
+                <a:cs typeface="Calibri" pitchFamily="34" charset="-120"/>
+              </a:rPr>
+              <a:t> </a:t>
+            </a:r>
+            <a:r>
+              <a:rPr lang="en-US" sz="1100" dirty="0" err="1">
+                <a:solidFill>
+                  <a:srgbClr val="A5B4FC"/>
+                </a:solidFill>
+                <a:latin typeface="Calibri" pitchFamily="34" charset="0"/>
+                <a:ea typeface="Calibri" pitchFamily="34" charset="-122"/>
+                <a:cs typeface="Calibri" pitchFamily="34" charset="-120"/>
+              </a:rPr>
+              <a:t>diuji</a:t>
+            </a:r>
+            <a:r>
+              <a:rPr lang="en-US" sz="1100" dirty="0">
+                <a:solidFill>
+                  <a:srgbClr val="A5B4FC"/>
+                </a:solidFill>
+                <a:latin typeface="Calibri" pitchFamily="34" charset="0"/>
+                <a:ea typeface="Calibri" pitchFamily="34" charset="-122"/>
+                <a:cs typeface="Calibri" pitchFamily="34" charset="-120"/>
+              </a:rPr>
+              <a:t> pada </a:t>
+            </a:r>
+            <a:r>
+              <a:rPr lang="en-US" sz="1100" dirty="0" err="1">
+                <a:solidFill>
+                  <a:srgbClr val="A5B4FC"/>
+                </a:solidFill>
+                <a:latin typeface="Calibri" pitchFamily="34" charset="0"/>
+                <a:ea typeface="Calibri" pitchFamily="34" charset="-122"/>
+                <a:cs typeface="Calibri" pitchFamily="34" charset="-120"/>
+              </a:rPr>
+              <a:t>berbagai</a:t>
+            </a:r>
+            <a:r>
+              <a:rPr lang="en-US" sz="1100" dirty="0">
+                <a:solidFill>
+                  <a:srgbClr val="A5B4FC"/>
+                </a:solidFill>
+                <a:latin typeface="Calibri" pitchFamily="34" charset="0"/>
+                <a:ea typeface="Calibri" pitchFamily="34" charset="-122"/>
+                <a:cs typeface="Calibri" pitchFamily="34" charset="-120"/>
+              </a:rPr>
+              <a:t> </a:t>
+            </a:r>
+            <a:r>
+              <a:rPr lang="en-US" sz="1100" dirty="0" err="1">
+                <a:solidFill>
+                  <a:srgbClr val="A5B4FC"/>
+                </a:solidFill>
+                <a:latin typeface="Calibri" pitchFamily="34" charset="0"/>
+                <a:ea typeface="Calibri" pitchFamily="34" charset="-122"/>
+                <a:cs typeface="Calibri" pitchFamily="34" charset="-120"/>
+              </a:rPr>
+              <a:t>lokasi</a:t>
+            </a:r>
+            <a:r>
+              <a:rPr lang="en-US" sz="1100" dirty="0">
+                <a:solidFill>
+                  <a:srgbClr val="A5B4FC"/>
+                </a:solidFill>
+                <a:latin typeface="Calibri" pitchFamily="34" charset="0"/>
+                <a:ea typeface="Calibri" pitchFamily="34" charset="-122"/>
+                <a:cs typeface="Calibri" pitchFamily="34" charset="-120"/>
+              </a:rPr>
+              <a:t> </a:t>
+            </a:r>
+            <a:r>
+              <a:rPr lang="en-US" sz="1100" dirty="0" err="1">
+                <a:solidFill>
+                  <a:srgbClr val="A5B4FC"/>
+                </a:solidFill>
+                <a:latin typeface="Calibri" pitchFamily="34" charset="0"/>
+                <a:ea typeface="Calibri" pitchFamily="34" charset="-122"/>
+                <a:cs typeface="Calibri" pitchFamily="34" charset="-120"/>
+              </a:rPr>
+              <a:t>geografis</a:t>
+            </a:r>
+            <a:r>
+              <a:rPr lang="en-US" sz="1100" dirty="0">
+                <a:solidFill>
+                  <a:srgbClr val="A5B4FC"/>
+                </a:solidFill>
+                <a:latin typeface="Calibri" pitchFamily="34" charset="0"/>
+                <a:ea typeface="Calibri" pitchFamily="34" charset="-122"/>
+                <a:cs typeface="Calibri" pitchFamily="34" charset="-120"/>
+              </a:rPr>
+              <a:t> yang </a:t>
+            </a:r>
+            <a:r>
+              <a:rPr lang="en-US" sz="1100" dirty="0" err="1">
+                <a:solidFill>
+                  <a:srgbClr val="A5B4FC"/>
+                </a:solidFill>
+                <a:latin typeface="Calibri" pitchFamily="34" charset="0"/>
+                <a:ea typeface="Calibri" pitchFamily="34" charset="-122"/>
+                <a:cs typeface="Calibri" pitchFamily="34" charset="-120"/>
+              </a:rPr>
+              <a:t>berbeda</a:t>
+            </a:r>
+            <a:r>
+              <a:rPr lang="en-US" sz="1100" dirty="0">
+                <a:solidFill>
+                  <a:srgbClr val="A5B4FC"/>
+                </a:solidFill>
+                <a:latin typeface="Calibri" pitchFamily="34" charset="0"/>
+                <a:ea typeface="Calibri" pitchFamily="34" charset="-122"/>
+                <a:cs typeface="Calibri" pitchFamily="34" charset="-120"/>
+              </a:rPr>
+              <a:t>.</a:t>
             </a:r>
             <a:endParaRPr lang="en-US" sz="1100" dirty="0"/>
           </a:p>
@@ -28086,54 +28537,7 @@
       </p:sp>
       <p:sp>
         <p:nvSpPr>
-          <p:cNvPr id="25" name="Shape 23"/>
-          <p:cNvSpPr/>
-          <p:nvPr/>
-        </p:nvSpPr>
-        <p:spPr>
-          <a:xfrm>
-            <a:off x="274320" y="4251960"/>
-            <a:ext cx="8595360" cy="731520"/>
-          </a:xfrm>
-          <a:prstGeom prst="rect">
-            <a:avLst/>
-          </a:prstGeom>
-          <a:solidFill>
-            <a:srgbClr val="0F2040"/>
-          </a:solidFill>
-          <a:ln/>
-          <a:effectLst>
-            <a:outerShdw blurRad="101600" dist="38100" dir="8100000" algn="bl" rotWithShape="0">
-              <a:srgbClr val="000000">
-                <a:alpha val="18000"/>
-              </a:srgbClr>
-            </a:outerShdw>
-          </a:effectLst>
-        </p:spPr>
-      </p:sp>
-      <p:sp>
-        <p:nvSpPr>
-          <p:cNvPr id="26" name="Shape 24"/>
-          <p:cNvSpPr/>
-          <p:nvPr/>
-        </p:nvSpPr>
-        <p:spPr>
-          <a:xfrm>
-            <a:off x="274320" y="4251960"/>
-            <a:ext cx="54864" cy="731520"/>
-          </a:xfrm>
-          <a:prstGeom prst="rect">
-            <a:avLst/>
-          </a:prstGeom>
-          <a:solidFill>
-            <a:srgbClr val="EF4444"/>
-          </a:solidFill>
-          <a:ln/>
-        </p:spPr>
-      </p:sp>
-      <p:sp>
-        <p:nvSpPr>
-          <p:cNvPr id="27" name="Shape 25"/>
+          <p:cNvPr id="28" name="Text 26"/>
           <p:cNvSpPr/>
           <p:nvPr/>
         </p:nvSpPr>
@@ -28142,26 +28546,6 @@
             <a:off x="438912" y="4416552"/>
             <a:ext cx="402336" cy="402336"/>
           </a:xfrm>
-          <a:prstGeom prst="ellipse">
-            <a:avLst/>
-          </a:prstGeom>
-          <a:solidFill>
-            <a:srgbClr val="EF4444"/>
-          </a:solidFill>
-          <a:ln/>
-        </p:spPr>
-      </p:sp>
-      <p:sp>
-        <p:nvSpPr>
-          <p:cNvPr id="28" name="Text 26"/>
-          <p:cNvSpPr/>
-          <p:nvPr/>
-        </p:nvSpPr>
-        <p:spPr>
-          <a:xfrm>
-            <a:off x="438912" y="4416552"/>
-            <a:ext cx="402336" cy="402336"/>
-          </a:xfrm>
           <a:prstGeom prst="rect">
             <a:avLst/>
           </a:prstGeom>
@@ -28175,14 +28559,6 @@
             <a:pPr marL="0" indent="0" algn="ctr">
               <a:buNone/>
             </a:pPr>
-            <a:r>
-              <a:rPr lang="en-US" sz="1200" b="1" dirty="0">
-                <a:solidFill>
-                  <a:srgbClr val="FFFFFF"/>
-                </a:solidFill>
-              </a:rPr>
-              <a:t>✖</a:t>
-            </a:r>
             <a:endParaRPr lang="en-US" sz="1200" dirty="0"/>
           </a:p>
         </p:txBody>
@@ -28211,17 +28587,6 @@
             <a:pPr marL="0" indent="0">
               <a:buNone/>
             </a:pPr>
-            <a:r>
-              <a:rPr lang="en-US" sz="1100" dirty="0">
-                <a:solidFill>
-                  <a:srgbClr val="A5B4FC"/>
-                </a:solidFill>
-                <a:latin typeface="Calibri" pitchFamily="34" charset="0"/>
-                <a:ea typeface="Calibri" pitchFamily="34" charset="-122"/>
-                <a:cs typeface="Calibri" pitchFamily="34" charset="-120"/>
-              </a:rPr>
-              <a:t>Model belum diuji pada berbagai lokasi geografis yang berbeda (Indonesia, Asia, Eropa).</a:t>
-            </a:r>
             <a:endParaRPr lang="en-US" sz="1100" dirty="0"/>
           </a:p>
         </p:txBody>
@@ -28823,13 +29188,125 @@
       </p:sp>
       <p:sp>
         <p:nvSpPr>
-          <p:cNvPr id="20" name="Shape 18"/>
-          <p:cNvSpPr/>
-          <p:nvPr/>
-        </p:nvSpPr>
-        <p:spPr>
-          <a:xfrm>
-            <a:off x="274320" y="2761488"/>
+          <p:cNvPr id="22" name="Text 20"/>
+          <p:cNvSpPr/>
+          <p:nvPr/>
+        </p:nvSpPr>
+        <p:spPr>
+          <a:xfrm>
+            <a:off x="365760" y="2880360"/>
+            <a:ext cx="566928" cy="566928"/>
+          </a:xfrm>
+          <a:prstGeom prst="rect">
+            <a:avLst/>
+          </a:prstGeom>
+          <a:noFill/>
+          <a:ln/>
+        </p:spPr>
+        <p:txBody>
+          <a:bodyPr wrap="square" rtlCol="0" anchor="ctr"/>
+          <a:lstStyle/>
+          <a:p>
+            <a:pPr marL="0" indent="0" algn="ctr">
+              <a:buNone/>
+            </a:pPr>
+            <a:endParaRPr lang="en-US" sz="2200" dirty="0"/>
+          </a:p>
+        </p:txBody>
+      </p:sp>
+      <p:sp>
+        <p:nvSpPr>
+          <p:cNvPr id="24" name="Text 22"/>
+          <p:cNvSpPr/>
+          <p:nvPr/>
+        </p:nvSpPr>
+        <p:spPr>
+          <a:xfrm>
+            <a:off x="365760" y="3511296"/>
+            <a:ext cx="2468880" cy="896112"/>
+          </a:xfrm>
+          <a:prstGeom prst="rect">
+            <a:avLst/>
+          </a:prstGeom>
+          <a:noFill/>
+          <a:ln/>
+        </p:spPr>
+        <p:txBody>
+          <a:bodyPr wrap="square" lIns="0" tIns="0" rIns="0" bIns="0" rtlCol="0" anchor="ctr"/>
+          <a:lstStyle/>
+          <a:p>
+            <a:pPr marL="0" indent="0">
+              <a:buNone/>
+            </a:pPr>
+            <a:endParaRPr lang="en-US" sz="950" dirty="0"/>
+          </a:p>
+        </p:txBody>
+      </p:sp>
+      <p:sp>
+        <p:nvSpPr>
+          <p:cNvPr id="27" name="Text 25"/>
+          <p:cNvSpPr/>
+          <p:nvPr/>
+        </p:nvSpPr>
+        <p:spPr>
+          <a:xfrm>
+            <a:off x="3246120" y="2880360"/>
+            <a:ext cx="566928" cy="566928"/>
+          </a:xfrm>
+          <a:prstGeom prst="rect">
+            <a:avLst/>
+          </a:prstGeom>
+          <a:noFill/>
+          <a:ln/>
+        </p:spPr>
+        <p:txBody>
+          <a:bodyPr wrap="square" rtlCol="0" anchor="ctr"/>
+          <a:lstStyle/>
+          <a:p>
+            <a:pPr marL="0" indent="0" algn="ctr">
+              <a:buNone/>
+            </a:pPr>
+            <a:endParaRPr lang="en-US" sz="2200" dirty="0"/>
+          </a:p>
+        </p:txBody>
+      </p:sp>
+      <p:sp>
+        <p:nvSpPr>
+          <p:cNvPr id="29" name="Text 27"/>
+          <p:cNvSpPr/>
+          <p:nvPr/>
+        </p:nvSpPr>
+        <p:spPr>
+          <a:xfrm>
+            <a:off x="3246120" y="3511296"/>
+            <a:ext cx="2468880" cy="896112"/>
+          </a:xfrm>
+          <a:prstGeom prst="rect">
+            <a:avLst/>
+          </a:prstGeom>
+          <a:noFill/>
+          <a:ln/>
+        </p:spPr>
+        <p:txBody>
+          <a:bodyPr wrap="square" lIns="0" tIns="0" rIns="0" bIns="0" rtlCol="0" anchor="ctr"/>
+          <a:lstStyle/>
+          <a:p>
+            <a:pPr marL="0" indent="0">
+              <a:buNone/>
+            </a:pPr>
+            <a:endParaRPr lang="en-US" sz="950" dirty="0"/>
+          </a:p>
+        </p:txBody>
+      </p:sp>
+      <p:sp>
+        <p:nvSpPr>
+          <p:cNvPr id="30" name="Shape 28"/>
+          <p:cNvSpPr/>
+          <p:nvPr/>
+        </p:nvSpPr>
+        <p:spPr>
+          <a:xfrm>
+            <a:off x="3155356" y="2761488"/>
             <a:ext cx="2651760" cy="1783080"/>
           </a:xfrm>
           <a:prstGeom prst="rect">
@@ -28850,33 +29327,33 @@
       </p:sp>
       <p:sp>
         <p:nvSpPr>
-          <p:cNvPr id="21" name="Shape 19"/>
-          <p:cNvSpPr/>
-          <p:nvPr/>
-        </p:nvSpPr>
-        <p:spPr>
-          <a:xfrm>
-            <a:off x="274320" y="2761488"/>
+          <p:cNvPr id="31" name="Shape 29"/>
+          <p:cNvSpPr/>
+          <p:nvPr/>
+        </p:nvSpPr>
+        <p:spPr>
+          <a:xfrm>
+            <a:off x="3155356" y="2761488"/>
             <a:ext cx="2651760" cy="64008"/>
           </a:xfrm>
           <a:prstGeom prst="rect">
             <a:avLst/>
           </a:prstGeom>
           <a:solidFill>
-            <a:srgbClr val="10B981"/>
-          </a:solidFill>
-          <a:ln/>
-        </p:spPr>
-      </p:sp>
-      <p:sp>
-        <p:nvSpPr>
-          <p:cNvPr id="22" name="Text 20"/>
-          <p:cNvSpPr/>
-          <p:nvPr/>
-        </p:nvSpPr>
-        <p:spPr>
-          <a:xfrm>
-            <a:off x="365760" y="2880360"/>
+            <a:srgbClr val="A855F7"/>
+          </a:solidFill>
+          <a:ln/>
+        </p:spPr>
+      </p:sp>
+      <p:sp>
+        <p:nvSpPr>
+          <p:cNvPr id="32" name="Text 30"/>
+          <p:cNvSpPr/>
+          <p:nvPr/>
+        </p:nvSpPr>
+        <p:spPr>
+          <a:xfrm>
+            <a:off x="3246796" y="2880360"/>
             <a:ext cx="566928" cy="566928"/>
           </a:xfrm>
           <a:prstGeom prst="rect">
@@ -28898,7 +29375,7 @@
                   <a:srgbClr val="000000"/>
                 </a:solidFill>
               </a:rPr>
-              <a:t>📥</a:t>
+              <a:t>🌐</a:t>
             </a:r>
             <a:endParaRPr lang="en-US" sz="2200" dirty="0"/>
           </a:p>
@@ -28906,13 +29383,13 @@
       </p:sp>
       <p:sp>
         <p:nvSpPr>
-          <p:cNvPr id="23" name="Text 21"/>
-          <p:cNvSpPr/>
-          <p:nvPr/>
-        </p:nvSpPr>
-        <p:spPr>
-          <a:xfrm>
-            <a:off x="1005840" y="2898648"/>
+          <p:cNvPr id="33" name="Text 31"/>
+          <p:cNvSpPr/>
+          <p:nvPr/>
+        </p:nvSpPr>
+        <p:spPr>
+          <a:xfrm>
+            <a:off x="3886876" y="2898648"/>
             <a:ext cx="1783080" cy="411480"/>
           </a:xfrm>
           <a:prstGeom prst="rect">
@@ -28937,7 +29414,7 @@
                 <a:ea typeface="Calibri" pitchFamily="34" charset="-122"/>
                 <a:cs typeface="Calibri" pitchFamily="34" charset="-120"/>
               </a:rPr>
-              <a:t>Export ke CSV</a:t>
+              <a:t>Deploy Online</a:t>
             </a:r>
             <a:endParaRPr lang="en-US" sz="1100" dirty="0"/>
           </a:p>
@@ -28945,335 +29422,13 @@
       </p:sp>
       <p:sp>
         <p:nvSpPr>
-          <p:cNvPr id="24" name="Text 22"/>
-          <p:cNvSpPr/>
-          <p:nvPr/>
-        </p:nvSpPr>
-        <p:spPr>
-          <a:xfrm>
-            <a:off x="365760" y="3511296"/>
-            <a:ext cx="2468880" cy="896112"/>
-          </a:xfrm>
-          <a:prstGeom prst="rect">
-            <a:avLst/>
-          </a:prstGeom>
-          <a:noFill/>
-          <a:ln/>
-        </p:spPr>
-        <p:txBody>
-          <a:bodyPr wrap="square" lIns="0" tIns="0" rIns="0" bIns="0" rtlCol="0" anchor="ctr"/>
-          <a:lstStyle/>
-          <a:p>
-            <a:pPr marL="0" indent="0">
-              <a:buNone/>
-            </a:pPr>
-            <a:r>
-              <a:rPr lang="en-US" sz="950" dirty="0">
-                <a:solidFill>
-                  <a:srgbClr val="1E293B"/>
-                </a:solidFill>
-                <a:latin typeface="Calibri" pitchFamily="34" charset="0"/>
-                <a:ea typeface="Calibri" pitchFamily="34" charset="-122"/>
-                <a:cs typeface="Calibri" pitchFamily="34" charset="-120"/>
-              </a:rPr>
-              <a:t>Tambahkan fitur download hasil deteksi dalam format spreadsheet CSV.</a:t>
-            </a:r>
-            <a:endParaRPr lang="en-US" sz="950" dirty="0"/>
-          </a:p>
-        </p:txBody>
-      </p:sp>
-      <p:sp>
-        <p:nvSpPr>
-          <p:cNvPr id="25" name="Shape 23"/>
-          <p:cNvSpPr/>
-          <p:nvPr/>
-        </p:nvSpPr>
-        <p:spPr>
-          <a:xfrm>
-            <a:off x="3154680" y="2761488"/>
-            <a:ext cx="2651760" cy="1783080"/>
-          </a:xfrm>
-          <a:prstGeom prst="rect">
-            <a:avLst/>
-          </a:prstGeom>
-          <a:solidFill>
-            <a:srgbClr val="FFFFFF"/>
-          </a:solidFill>
-          <a:ln/>
-          <a:effectLst>
-            <a:outerShdw blurRad="101600" dist="38100" dir="8100000" algn="bl" rotWithShape="0">
-              <a:srgbClr val="000000">
-                <a:alpha val="18000"/>
-              </a:srgbClr>
-            </a:outerShdw>
-          </a:effectLst>
-        </p:spPr>
-      </p:sp>
-      <p:sp>
-        <p:nvSpPr>
-          <p:cNvPr id="26" name="Shape 24"/>
-          <p:cNvSpPr/>
-          <p:nvPr/>
-        </p:nvSpPr>
-        <p:spPr>
-          <a:xfrm>
-            <a:off x="3154680" y="2761488"/>
-            <a:ext cx="2651760" cy="64008"/>
-          </a:xfrm>
-          <a:prstGeom prst="rect">
-            <a:avLst/>
-          </a:prstGeom>
-          <a:solidFill>
-            <a:srgbClr val="F59E0B"/>
-          </a:solidFill>
-          <a:ln/>
-        </p:spPr>
-      </p:sp>
-      <p:sp>
-        <p:nvSpPr>
-          <p:cNvPr id="27" name="Text 25"/>
-          <p:cNvSpPr/>
-          <p:nvPr/>
-        </p:nvSpPr>
-        <p:spPr>
-          <a:xfrm>
-            <a:off x="3246120" y="2880360"/>
-            <a:ext cx="566928" cy="566928"/>
-          </a:xfrm>
-          <a:prstGeom prst="rect">
-            <a:avLst/>
-          </a:prstGeom>
-          <a:noFill/>
-          <a:ln/>
-        </p:spPr>
-        <p:txBody>
-          <a:bodyPr wrap="square" rtlCol="0" anchor="ctr"/>
-          <a:lstStyle/>
-          <a:p>
-            <a:pPr marL="0" indent="0" algn="ctr">
-              <a:buNone/>
-            </a:pPr>
-            <a:r>
-              <a:rPr lang="en-US" sz="2200" dirty="0">
-                <a:solidFill>
-                  <a:srgbClr val="000000"/>
-                </a:solidFill>
-              </a:rPr>
-              <a:t>🎯</a:t>
-            </a:r>
-            <a:endParaRPr lang="en-US" sz="2200" dirty="0"/>
-          </a:p>
-        </p:txBody>
-      </p:sp>
-      <p:sp>
-        <p:nvSpPr>
-          <p:cNvPr id="28" name="Text 26"/>
-          <p:cNvSpPr/>
-          <p:nvPr/>
-        </p:nvSpPr>
-        <p:spPr>
-          <a:xfrm>
-            <a:off x="3886200" y="2898648"/>
-            <a:ext cx="1783080" cy="411480"/>
-          </a:xfrm>
-          <a:prstGeom prst="rect">
-            <a:avLst/>
-          </a:prstGeom>
-          <a:noFill/>
-          <a:ln/>
-        </p:spPr>
-        <p:txBody>
-          <a:bodyPr wrap="square" lIns="0" tIns="0" rIns="0" bIns="0" rtlCol="0" anchor="ctr"/>
-          <a:lstStyle/>
-          <a:p>
-            <a:pPr marL="0" indent="0">
-              <a:buNone/>
-            </a:pPr>
-            <a:r>
-              <a:rPr lang="en-US" sz="1100" b="1" dirty="0">
-                <a:solidFill>
-                  <a:srgbClr val="0A1628"/>
-                </a:solidFill>
-                <a:latin typeface="Calibri" pitchFamily="34" charset="0"/>
-                <a:ea typeface="Calibri" pitchFamily="34" charset="-122"/>
-                <a:cs typeface="Calibri" pitchFamily="34" charset="-120"/>
-              </a:rPr>
-              <a:t>Confidence per Obj</a:t>
-            </a:r>
-            <a:endParaRPr lang="en-US" sz="1100" dirty="0"/>
-          </a:p>
-        </p:txBody>
-      </p:sp>
-      <p:sp>
-        <p:nvSpPr>
-          <p:cNvPr id="29" name="Text 27"/>
-          <p:cNvSpPr/>
-          <p:nvPr/>
-        </p:nvSpPr>
-        <p:spPr>
-          <a:xfrm>
-            <a:off x="3246120" y="3511296"/>
-            <a:ext cx="2468880" cy="896112"/>
-          </a:xfrm>
-          <a:prstGeom prst="rect">
-            <a:avLst/>
-          </a:prstGeom>
-          <a:noFill/>
-          <a:ln/>
-        </p:spPr>
-        <p:txBody>
-          <a:bodyPr wrap="square" lIns="0" tIns="0" rIns="0" bIns="0" rtlCol="0" anchor="ctr"/>
-          <a:lstStyle/>
-          <a:p>
-            <a:pPr marL="0" indent="0">
-              <a:buNone/>
-            </a:pPr>
-            <a:r>
-              <a:rPr lang="en-US" sz="950" dirty="0">
-                <a:solidFill>
-                  <a:srgbClr val="1E293B"/>
-                </a:solidFill>
-                <a:latin typeface="Calibri" pitchFamily="34" charset="0"/>
-                <a:ea typeface="Calibri" pitchFamily="34" charset="-122"/>
-                <a:cs typeface="Calibri" pitchFamily="34" charset="-120"/>
-              </a:rPr>
-              <a:t>Tampilkan nilai confidence score di atas tiap bounding box.</a:t>
-            </a:r>
-            <a:endParaRPr lang="en-US" sz="950" dirty="0"/>
-          </a:p>
-        </p:txBody>
-      </p:sp>
-      <p:sp>
-        <p:nvSpPr>
-          <p:cNvPr id="30" name="Shape 28"/>
-          <p:cNvSpPr/>
-          <p:nvPr/>
-        </p:nvSpPr>
-        <p:spPr>
-          <a:xfrm>
-            <a:off x="6035040" y="2761488"/>
-            <a:ext cx="2651760" cy="1783080"/>
-          </a:xfrm>
-          <a:prstGeom prst="rect">
-            <a:avLst/>
-          </a:prstGeom>
-          <a:solidFill>
-            <a:srgbClr val="FFFFFF"/>
-          </a:solidFill>
-          <a:ln/>
-          <a:effectLst>
-            <a:outerShdw blurRad="101600" dist="38100" dir="8100000" algn="bl" rotWithShape="0">
-              <a:srgbClr val="000000">
-                <a:alpha val="18000"/>
-              </a:srgbClr>
-            </a:outerShdw>
-          </a:effectLst>
-        </p:spPr>
-      </p:sp>
-      <p:sp>
-        <p:nvSpPr>
-          <p:cNvPr id="31" name="Shape 29"/>
-          <p:cNvSpPr/>
-          <p:nvPr/>
-        </p:nvSpPr>
-        <p:spPr>
-          <a:xfrm>
-            <a:off x="6035040" y="2761488"/>
-            <a:ext cx="2651760" cy="64008"/>
-          </a:xfrm>
-          <a:prstGeom prst="rect">
-            <a:avLst/>
-          </a:prstGeom>
-          <a:solidFill>
-            <a:srgbClr val="A855F7"/>
-          </a:solidFill>
-          <a:ln/>
-        </p:spPr>
-      </p:sp>
-      <p:sp>
-        <p:nvSpPr>
-          <p:cNvPr id="32" name="Text 30"/>
-          <p:cNvSpPr/>
-          <p:nvPr/>
-        </p:nvSpPr>
-        <p:spPr>
-          <a:xfrm>
-            <a:off x="6126480" y="2880360"/>
-            <a:ext cx="566928" cy="566928"/>
-          </a:xfrm>
-          <a:prstGeom prst="rect">
-            <a:avLst/>
-          </a:prstGeom>
-          <a:noFill/>
-          <a:ln/>
-        </p:spPr>
-        <p:txBody>
-          <a:bodyPr wrap="square" rtlCol="0" anchor="ctr"/>
-          <a:lstStyle/>
-          <a:p>
-            <a:pPr marL="0" indent="0" algn="ctr">
-              <a:buNone/>
-            </a:pPr>
-            <a:r>
-              <a:rPr lang="en-US" sz="2200" dirty="0">
-                <a:solidFill>
-                  <a:srgbClr val="000000"/>
-                </a:solidFill>
-              </a:rPr>
-              <a:t>🌐</a:t>
-            </a:r>
-            <a:endParaRPr lang="en-US" sz="2200" dirty="0"/>
-          </a:p>
-        </p:txBody>
-      </p:sp>
-      <p:sp>
-        <p:nvSpPr>
-          <p:cNvPr id="33" name="Text 31"/>
-          <p:cNvSpPr/>
-          <p:nvPr/>
-        </p:nvSpPr>
-        <p:spPr>
-          <a:xfrm>
-            <a:off x="6766560" y="2898648"/>
-            <a:ext cx="1783080" cy="411480"/>
-          </a:xfrm>
-          <a:prstGeom prst="rect">
-            <a:avLst/>
-          </a:prstGeom>
-          <a:noFill/>
-          <a:ln/>
-        </p:spPr>
-        <p:txBody>
-          <a:bodyPr wrap="square" lIns="0" tIns="0" rIns="0" bIns="0" rtlCol="0" anchor="ctr"/>
-          <a:lstStyle/>
-          <a:p>
-            <a:pPr marL="0" indent="0">
-              <a:buNone/>
-            </a:pPr>
-            <a:r>
-              <a:rPr lang="en-US" sz="1100" b="1" dirty="0">
-                <a:solidFill>
-                  <a:srgbClr val="0A1628"/>
-                </a:solidFill>
-                <a:latin typeface="Calibri" pitchFamily="34" charset="0"/>
-                <a:ea typeface="Calibri" pitchFamily="34" charset="-122"/>
-                <a:cs typeface="Calibri" pitchFamily="34" charset="-120"/>
-              </a:rPr>
-              <a:t>Deploy Online</a:t>
-            </a:r>
-            <a:endParaRPr lang="en-US" sz="1100" dirty="0"/>
-          </a:p>
-        </p:txBody>
-      </p:sp>
-      <p:sp>
-        <p:nvSpPr>
           <p:cNvPr id="34" name="Text 32"/>
           <p:cNvSpPr/>
           <p:nvPr/>
         </p:nvSpPr>
         <p:spPr>
           <a:xfrm>
-            <a:off x="6126480" y="3511296"/>
+            <a:off x="3246796" y="3511296"/>
             <a:ext cx="2468880" cy="896112"/>
           </a:xfrm>
           <a:prstGeom prst="rect">

--- a/ppt/Building_Detection_YOLOv8_PPT.pptx
+++ b/ppt/Building_Detection_YOLOv8_PPT.pptx
@@ -3901,7 +3901,7 @@
         </p:nvSpPr>
         <p:spPr>
           <a:xfrm>
-            <a:off x="502920" y="3584448"/>
+            <a:off x="502920" y="3127242"/>
             <a:ext cx="1554480" cy="347472"/>
           </a:xfrm>
           <a:prstGeom prst="roundRect">
@@ -4307,7 +4307,51 @@
                 <a:ea typeface="Calibri" pitchFamily="34" charset="-122"/>
                 <a:cs typeface="Calibri" pitchFamily="34" charset="-120"/>
               </a:rPr>
-              <a:t> Wildan Pratama</a:t>
+              <a:t> </a:t>
+            </a:r>
+            <a:r>
+              <a:rPr lang="en-US" sz="1300" b="1" dirty="0" err="1">
+                <a:solidFill>
+                  <a:srgbClr val="FFFFFF"/>
+                </a:solidFill>
+                <a:latin typeface="Calibri" pitchFamily="34" charset="0"/>
+                <a:ea typeface="Calibri" pitchFamily="34" charset="-122"/>
+                <a:cs typeface="Calibri" pitchFamily="34" charset="-120"/>
+              </a:rPr>
+              <a:t>Wildan</a:t>
+            </a:r>
+            <a:r>
+              <a:rPr lang="en-US" sz="1300" b="1" dirty="0">
+                <a:solidFill>
+                  <a:srgbClr val="FFFFFF"/>
+                </a:solidFill>
+                <a:latin typeface="Calibri" pitchFamily="34" charset="0"/>
+                <a:ea typeface="Calibri" pitchFamily="34" charset="-122"/>
+                <a:cs typeface="Calibri" pitchFamily="34" charset="-120"/>
+              </a:rPr>
+              <a:t> </a:t>
+            </a:r>
+            <a:r>
+              <a:rPr lang="en-US" sz="1300" b="1" dirty="0" err="1">
+                <a:solidFill>
+                  <a:srgbClr val="FFFFFF"/>
+                </a:solidFill>
+                <a:latin typeface="Calibri" pitchFamily="34" charset="0"/>
+                <a:ea typeface="Calibri" pitchFamily="34" charset="-122"/>
+                <a:cs typeface="Calibri" pitchFamily="34" charset="-120"/>
+              </a:rPr>
+              <a:t>Pratama</a:t>
+            </a:r>
+            <a:r>
+              <a:rPr lang="en-US" sz="1300" b="1" dirty="0">
+                <a:solidFill>
+                  <a:srgbClr val="FFFFFF"/>
+                </a:solidFill>
+                <a:latin typeface="Calibri" pitchFamily="34" charset="0"/>
+                <a:ea typeface="Calibri" pitchFamily="34" charset="-122"/>
+                <a:cs typeface="Calibri" pitchFamily="34" charset="-120"/>
+              </a:rPr>
+              <a:t> (2405061)</a:t>
             </a:r>
             <a:endParaRPr lang="en-US" sz="1300" dirty="0"/>
           </a:p>
@@ -19224,7 +19268,161 @@
                 <a:ea typeface="Calibri" pitchFamily="34" charset="-122"/>
                 <a:cs typeface="Calibri" pitchFamily="34" charset="-120"/>
               </a:rPr>
-              <a:t>Tampilkan tabel dengan nama kelas, jumlah, dan confidence.</a:t>
+              <a:t>Tampilkan tabel dengan nama kelas, jumlah, dan confidence, </a:t>
+            </a:r>
+            <a:r>
+              <a:rPr lang="en-US" sz="950" b="1" dirty="0" err="1">
+                <a:solidFill>
+                  <a:srgbClr val="94A3B8"/>
+                </a:solidFill>
+                <a:latin typeface="Calibri" pitchFamily="34" charset="0"/>
+                <a:ea typeface="Calibri" pitchFamily="34" charset="-122"/>
+                <a:cs typeface="Calibri" pitchFamily="34" charset="-120"/>
+              </a:rPr>
+              <a:t>serta</a:t>
+            </a:r>
+            <a:r>
+              <a:rPr lang="en-US" sz="950" b="1" dirty="0">
+                <a:solidFill>
+                  <a:srgbClr val="94A3B8"/>
+                </a:solidFill>
+                <a:latin typeface="Calibri" pitchFamily="34" charset="0"/>
+                <a:ea typeface="Calibri" pitchFamily="34" charset="-122"/>
+                <a:cs typeface="Calibri" pitchFamily="34" charset="-120"/>
+              </a:rPr>
+              <a:t> </a:t>
+            </a:r>
+            <a:r>
+              <a:rPr lang="en-US" sz="950" b="1" dirty="0" err="1">
+                <a:solidFill>
+                  <a:srgbClr val="94A3B8"/>
+                </a:solidFill>
+                <a:latin typeface="Calibri" pitchFamily="34" charset="0"/>
+                <a:ea typeface="Calibri" pitchFamily="34" charset="-122"/>
+                <a:cs typeface="Calibri" pitchFamily="34" charset="-120"/>
+              </a:rPr>
+              <a:t>terdapat</a:t>
+            </a:r>
+            <a:r>
+              <a:rPr lang="en-US" sz="950" b="1" dirty="0">
+                <a:solidFill>
+                  <a:srgbClr val="94A3B8"/>
+                </a:solidFill>
+                <a:latin typeface="Calibri" pitchFamily="34" charset="0"/>
+                <a:ea typeface="Calibri" pitchFamily="34" charset="-122"/>
+                <a:cs typeface="Calibri" pitchFamily="34" charset="-120"/>
+              </a:rPr>
+              <a:t> detail </a:t>
+            </a:r>
+            <a:r>
+              <a:rPr lang="en-US" sz="950" b="1" dirty="0" err="1">
+                <a:solidFill>
+                  <a:srgbClr val="94A3B8"/>
+                </a:solidFill>
+                <a:latin typeface="Calibri" pitchFamily="34" charset="0"/>
+                <a:ea typeface="Calibri" pitchFamily="34" charset="-122"/>
+                <a:cs typeface="Calibri" pitchFamily="34" charset="-120"/>
+              </a:rPr>
+              <a:t>deteksi</a:t>
+            </a:r>
+            <a:r>
+              <a:rPr lang="en-US" sz="950" b="1" dirty="0">
+                <a:solidFill>
+                  <a:srgbClr val="94A3B8"/>
+                </a:solidFill>
+                <a:latin typeface="Calibri" pitchFamily="34" charset="0"/>
+                <a:ea typeface="Calibri" pitchFamily="34" charset="-122"/>
+                <a:cs typeface="Calibri" pitchFamily="34" charset="-120"/>
+              </a:rPr>
+              <a:t>. </a:t>
+            </a:r>
+            <a:r>
+              <a:rPr lang="en-US" sz="950" b="1" dirty="0" err="1">
+                <a:solidFill>
+                  <a:srgbClr val="94A3B8"/>
+                </a:solidFill>
+                <a:latin typeface="Calibri" pitchFamily="34" charset="0"/>
+                <a:ea typeface="Calibri" pitchFamily="34" charset="-122"/>
+                <a:cs typeface="Calibri" pitchFamily="34" charset="-120"/>
+              </a:rPr>
+              <a:t>Keduanya</a:t>
+            </a:r>
+            <a:r>
+              <a:rPr lang="en-US" sz="950" b="1" dirty="0">
+                <a:solidFill>
+                  <a:srgbClr val="94A3B8"/>
+                </a:solidFill>
+                <a:latin typeface="Calibri" pitchFamily="34" charset="0"/>
+                <a:ea typeface="Calibri" pitchFamily="34" charset="-122"/>
+                <a:cs typeface="Calibri" pitchFamily="34" charset="-120"/>
+              </a:rPr>
+              <a:t> </a:t>
+            </a:r>
+            <a:r>
+              <a:rPr lang="en-US" sz="950" b="1" dirty="0" err="1">
+                <a:solidFill>
+                  <a:srgbClr val="94A3B8"/>
+                </a:solidFill>
+                <a:latin typeface="Calibri" pitchFamily="34" charset="0"/>
+                <a:ea typeface="Calibri" pitchFamily="34" charset="-122"/>
+                <a:cs typeface="Calibri" pitchFamily="34" charset="-120"/>
+              </a:rPr>
+              <a:t>dapat</a:t>
+            </a:r>
+            <a:r>
+              <a:rPr lang="en-US" sz="950" b="1" dirty="0">
+                <a:solidFill>
+                  <a:srgbClr val="94A3B8"/>
+                </a:solidFill>
+                <a:latin typeface="Calibri" pitchFamily="34" charset="0"/>
+                <a:ea typeface="Calibri" pitchFamily="34" charset="-122"/>
+                <a:cs typeface="Calibri" pitchFamily="34" charset="-120"/>
+              </a:rPr>
+              <a:t> </a:t>
+            </a:r>
+            <a:r>
+              <a:rPr lang="en-US" sz="950" b="1" dirty="0" err="1">
+                <a:solidFill>
+                  <a:srgbClr val="94A3B8"/>
+                </a:solidFill>
+                <a:latin typeface="Calibri" pitchFamily="34" charset="0"/>
+                <a:ea typeface="Calibri" pitchFamily="34" charset="-122"/>
+                <a:cs typeface="Calibri" pitchFamily="34" charset="-120"/>
+              </a:rPr>
+              <a:t>didownload</a:t>
+            </a:r>
+            <a:r>
+              <a:rPr lang="en-US" sz="950" b="1" dirty="0">
+                <a:solidFill>
+                  <a:srgbClr val="94A3B8"/>
+                </a:solidFill>
+                <a:latin typeface="Calibri" pitchFamily="34" charset="0"/>
+                <a:ea typeface="Calibri" pitchFamily="34" charset="-122"/>
+                <a:cs typeface="Calibri" pitchFamily="34" charset="-120"/>
+              </a:rPr>
+              <a:t> </a:t>
+            </a:r>
+            <a:r>
+              <a:rPr lang="en-US" sz="950" b="1" dirty="0" err="1">
+                <a:solidFill>
+                  <a:srgbClr val="94A3B8"/>
+                </a:solidFill>
+                <a:latin typeface="Calibri" pitchFamily="34" charset="0"/>
+                <a:ea typeface="Calibri" pitchFamily="34" charset="-122"/>
+                <a:cs typeface="Calibri" pitchFamily="34" charset="-120"/>
+              </a:rPr>
+              <a:t>menjadi</a:t>
+            </a:r>
+            <a:r>
+              <a:rPr lang="en-US" sz="950" b="1" dirty="0">
+                <a:solidFill>
+                  <a:srgbClr val="94A3B8"/>
+                </a:solidFill>
+                <a:latin typeface="Calibri" pitchFamily="34" charset="0"/>
+                <a:ea typeface="Calibri" pitchFamily="34" charset="-122"/>
+                <a:cs typeface="Calibri" pitchFamily="34" charset="-120"/>
+              </a:rPr>
+              <a:t> .csv. </a:t>
             </a:r>
             <a:endParaRPr lang="en-US" sz="950" b="1" dirty="0"/>
           </a:p>
@@ -30642,7 +30840,7 @@
                   <a:srgbClr val="FFFFFF"/>
                 </a:solidFill>
               </a:rPr>
-              <a:t>✓</a:t>
+              <a:t>✓!</a:t>
             </a:r>
             <a:endParaRPr lang="en-US" sz="1600" dirty="0"/>
           </a:p>
@@ -30681,7 +30879,40 @@
                 <a:ea typeface="Calibri" pitchFamily="34" charset="-122"/>
                 <a:cs typeface="Calibri" pitchFamily="34" charset="-120"/>
               </a:rPr>
-              <a:t>Detection &amp; Counting OK</a:t>
+              <a:t>Detection &amp; Counting OK </a:t>
+            </a:r>
+            <a:r>
+              <a:rPr lang="en-US" sz="1300" b="1" dirty="0" err="1">
+                <a:solidFill>
+                  <a:srgbClr val="FFFFFF"/>
+                </a:solidFill>
+                <a:latin typeface="Calibri" pitchFamily="34" charset="0"/>
+                <a:ea typeface="Calibri" pitchFamily="34" charset="-122"/>
+                <a:cs typeface="Calibri" pitchFamily="34" charset="-120"/>
+              </a:rPr>
+              <a:t>dengan</a:t>
+            </a:r>
+            <a:r>
+              <a:rPr lang="en-US" sz="1300" b="1" dirty="0">
+                <a:solidFill>
+                  <a:srgbClr val="FFFFFF"/>
+                </a:solidFill>
+                <a:latin typeface="Calibri" pitchFamily="34" charset="0"/>
+                <a:ea typeface="Calibri" pitchFamily="34" charset="-122"/>
+                <a:cs typeface="Calibri" pitchFamily="34" charset="-120"/>
+              </a:rPr>
+              <a:t> </a:t>
+            </a:r>
+            <a:r>
+              <a:rPr lang="en-US" sz="1300" b="1" dirty="0" err="1">
+                <a:solidFill>
+                  <a:srgbClr val="FFFFFF"/>
+                </a:solidFill>
+                <a:latin typeface="Calibri" pitchFamily="34" charset="0"/>
+                <a:ea typeface="Calibri" pitchFamily="34" charset="-122"/>
+                <a:cs typeface="Calibri" pitchFamily="34" charset="-120"/>
+              </a:rPr>
+              <a:t>Pengecualian</a:t>
             </a:r>
             <a:endParaRPr lang="en-US" sz="1300" dirty="0"/>
           </a:p>
@@ -30720,7 +30951,139 @@
                 <a:ea typeface="Calibri" pitchFamily="34" charset="-122"/>
                 <a:cs typeface="Calibri" pitchFamily="34" charset="-120"/>
               </a:rPr>
-              <a:t>Sistem berhasil mendeteksi dan menghitung objek per kelas pada citra satelit.</a:t>
+              <a:t>Sistem berhasil mendeteksi dan menghitung objek per kelas pada </a:t>
+            </a:r>
+            <a:r>
+              <a:rPr lang="en-US" sz="1100" b="1" dirty="0" err="1">
+                <a:solidFill>
+                  <a:srgbClr val="94A3B8"/>
+                </a:solidFill>
+                <a:latin typeface="Calibri" pitchFamily="34" charset="0"/>
+                <a:ea typeface="Calibri" pitchFamily="34" charset="-122"/>
+                <a:cs typeface="Calibri" pitchFamily="34" charset="-120"/>
+              </a:rPr>
+              <a:t>citra</a:t>
+            </a:r>
+            <a:r>
+              <a:rPr lang="en-US" sz="1100" b="1" dirty="0">
+                <a:solidFill>
+                  <a:srgbClr val="94A3B8"/>
+                </a:solidFill>
+                <a:latin typeface="Calibri" pitchFamily="34" charset="0"/>
+                <a:ea typeface="Calibri" pitchFamily="34" charset="-122"/>
+                <a:cs typeface="Calibri" pitchFamily="34" charset="-120"/>
+              </a:rPr>
+              <a:t> </a:t>
+            </a:r>
+            <a:r>
+              <a:rPr lang="en-US" sz="1100" b="1" dirty="0" err="1">
+                <a:solidFill>
+                  <a:srgbClr val="94A3B8"/>
+                </a:solidFill>
+                <a:latin typeface="Calibri" pitchFamily="34" charset="0"/>
+                <a:ea typeface="Calibri" pitchFamily="34" charset="-122"/>
+                <a:cs typeface="Calibri" pitchFamily="34" charset="-120"/>
+              </a:rPr>
+              <a:t>satelit</a:t>
+            </a:r>
+            <a:r>
+              <a:rPr lang="en-US" sz="1100" b="1" dirty="0">
+                <a:solidFill>
+                  <a:srgbClr val="94A3B8"/>
+                </a:solidFill>
+                <a:latin typeface="Calibri" pitchFamily="34" charset="0"/>
+                <a:ea typeface="Calibri" pitchFamily="34" charset="-122"/>
+                <a:cs typeface="Calibri" pitchFamily="34" charset="-120"/>
+              </a:rPr>
+              <a:t>, </a:t>
+            </a:r>
+            <a:r>
+              <a:rPr lang="en-US" sz="1100" b="1" dirty="0" err="1">
+                <a:solidFill>
+                  <a:srgbClr val="94A3B8"/>
+                </a:solidFill>
+                <a:latin typeface="Calibri" pitchFamily="34" charset="0"/>
+                <a:ea typeface="Calibri" pitchFamily="34" charset="-122"/>
+                <a:cs typeface="Calibri" pitchFamily="34" charset="-120"/>
+              </a:rPr>
+              <a:t>kecuali</a:t>
+            </a:r>
+            <a:r>
+              <a:rPr lang="en-US" sz="1100" b="1" dirty="0">
+                <a:solidFill>
+                  <a:srgbClr val="94A3B8"/>
+                </a:solidFill>
+                <a:latin typeface="Calibri" pitchFamily="34" charset="0"/>
+                <a:ea typeface="Calibri" pitchFamily="34" charset="-122"/>
+                <a:cs typeface="Calibri" pitchFamily="34" charset="-120"/>
+              </a:rPr>
+              <a:t> </a:t>
+            </a:r>
+            <a:r>
+              <a:rPr lang="en-US" sz="1100" b="1" dirty="0" err="1">
+                <a:solidFill>
+                  <a:srgbClr val="94A3B8"/>
+                </a:solidFill>
+                <a:latin typeface="Calibri" pitchFamily="34" charset="0"/>
+                <a:ea typeface="Calibri" pitchFamily="34" charset="-122"/>
+                <a:cs typeface="Calibri" pitchFamily="34" charset="-120"/>
+              </a:rPr>
+              <a:t>rumah</a:t>
+            </a:r>
+            <a:r>
+              <a:rPr lang="en-US" sz="1100" b="1" dirty="0">
+                <a:solidFill>
+                  <a:srgbClr val="94A3B8"/>
+                </a:solidFill>
+                <a:latin typeface="Calibri" pitchFamily="34" charset="0"/>
+                <a:ea typeface="Calibri" pitchFamily="34" charset="-122"/>
+                <a:cs typeface="Calibri" pitchFamily="34" charset="-120"/>
+              </a:rPr>
+              <a:t> dan masjid yang </a:t>
+            </a:r>
+            <a:r>
+              <a:rPr lang="en-US" sz="1100" b="1" dirty="0" err="1">
+                <a:solidFill>
+                  <a:srgbClr val="94A3B8"/>
+                </a:solidFill>
+                <a:latin typeface="Calibri" pitchFamily="34" charset="0"/>
+                <a:ea typeface="Calibri" pitchFamily="34" charset="-122"/>
+                <a:cs typeface="Calibri" pitchFamily="34" charset="-120"/>
+              </a:rPr>
+              <a:t>masih</a:t>
+            </a:r>
+            <a:r>
+              <a:rPr lang="en-US" sz="1100" b="1" dirty="0">
+                <a:solidFill>
+                  <a:srgbClr val="94A3B8"/>
+                </a:solidFill>
+                <a:latin typeface="Calibri" pitchFamily="34" charset="0"/>
+                <a:ea typeface="Calibri" pitchFamily="34" charset="-122"/>
+                <a:cs typeface="Calibri" pitchFamily="34" charset="-120"/>
+              </a:rPr>
+              <a:t> </a:t>
+            </a:r>
+            <a:r>
+              <a:rPr lang="en-US" sz="1100" b="1" dirty="0" err="1">
+                <a:solidFill>
+                  <a:srgbClr val="94A3B8"/>
+                </a:solidFill>
+                <a:latin typeface="Calibri" pitchFamily="34" charset="0"/>
+                <a:ea typeface="Calibri" pitchFamily="34" charset="-122"/>
+                <a:cs typeface="Calibri" pitchFamily="34" charset="-120"/>
+              </a:rPr>
+              <a:t>sering</a:t>
+            </a:r>
+            <a:r>
+              <a:rPr lang="en-US" sz="1100" b="1" dirty="0">
+                <a:solidFill>
+                  <a:srgbClr val="94A3B8"/>
+                </a:solidFill>
+                <a:latin typeface="Calibri" pitchFamily="34" charset="0"/>
+                <a:ea typeface="Calibri" pitchFamily="34" charset="-122"/>
+                <a:cs typeface="Calibri" pitchFamily="34" charset="-120"/>
+              </a:rPr>
+              <a:t> miss.</a:t>
             </a:r>
             <a:endParaRPr lang="en-US" sz="1100" b="1" dirty="0"/>
           </a:p>
